--- a/CKD_Project_Presentation.pptx
+++ b/CKD_Project_Presentation.pptx
@@ -293,10 +293,7 @@
           <a:bodyPr/>
           <a:lstStyle/>
           <a:p>
-            <a:r>
-              <a:rPr lang="en-US" dirty="0"/>
-              <a:t>Good [morning/afternoon]. Today I'm presenting my CBIO313 final project: a machine-learning system that predicts Chronic Kidney Disease from a patient's routine clinical and laboratory measurements. I'll walk through the problem, the dataset, how I cleaned and explored the data, the models I built and tuned, the results, and finally the deployed web app.</a:t>
-            </a:r>
+            <a:endParaRPr lang="en-US" dirty="0"/>
           </a:p>
         </p:txBody>
       </p:sp>
@@ -380,10 +377,7 @@
           <a:bodyPr/>
           <a:lstStyle/>
           <a:p>
-            <a:r>
-              <a:rPr lang="en-US" dirty="0"/>
-              <a:t>Finally, deployment. Everything the app needs was saved as artifacts during training: the model itself, the fitted scaler, the label encoders for categorical inputs, the list of selected features, and the imputation medians. A Streamlit app, app.py, loads these and presents a simple form — a clinician enters a patient's values and immediately gets a predicted CKD risk and probability. This is deployable for free on Streamlit Community Cloud, which gives a public URL, satisfying the project's web-deployment requirement. I also built a small tester.py script so performance can be verified independently of the notebook.</a:t>
-            </a:r>
+            <a:endParaRPr lang="en-US" dirty="0"/>
           </a:p>
         </p:txBody>
       </p:sp>
@@ -467,10 +461,7 @@
           <a:bodyPr/>
           <a:lstStyle/>
           <a:p>
-            <a:r>
-              <a:rPr lang="en-US" dirty="0"/>
-              <a:t>To wrap up: this project shows the full applied machine-learning workflow on a genuinely messy, real-world biomedical dataset — transparent cleaning, multi-angle exploratory analysis, clinically motivated feature engineering, rigorous validation across three tuned algorithms, and a working deployed application. The main limitation is scale — four hundred patients from a single hospital — so external validation on a larger, multi-site cohort would be the natural next step before any real clinical use, along with more sophisticated imputation and explainability methods like SHAP so individual predictions are easier for a clinician to trust.</a:t>
-            </a:r>
+            <a:endParaRPr lang="en-US" dirty="0"/>
           </a:p>
         </p:txBody>
       </p:sp>
@@ -537,6 +528,89 @@
             <p:ph type="sldImg"/>
           </p:nvPr>
         </p:nvSpPr>
+        <p:spPr>
+          <a:xfrm>
+            <a:off x="-228600" y="1524000"/>
+            <a:ext cx="7315200" cy="4114800"/>
+          </a:xfrm>
+          <a:prstGeom prst="rect">
+            <a:avLst/>
+          </a:prstGeom>
+          <a:noFill/>
+          <a:ln w="12700">
+            <a:solidFill>
+              <a:prstClr val="black"/>
+            </a:solidFill>
+          </a:ln>
+        </p:spPr>
+      </p:sp>
+      <p:sp>
+        <p:nvSpPr>
+          <p:cNvPr id="3" name="Notes Placeholder 2"/>
+          <p:cNvSpPr>
+            <a:spLocks noGrp="1"/>
+          </p:cNvSpPr>
+          <p:nvPr>
+            <p:ph type="body" idx="1"/>
+          </p:nvPr>
+        </p:nvSpPr>
+        <p:spPr>
+          <a:xfrm>
+            <a:off x="685800" y="5867400"/>
+            <a:ext cx="5486400" cy="4800600"/>
+          </a:xfrm>
+          <a:prstGeom prst="rect">
+            <a:avLst/>
+          </a:prstGeom>
+        </p:spPr>
+        <p:txBody>
+          <a:bodyPr/>
+          <a:lstStyle/>
+          <a:p>
+            <a:endParaRPr lang="en-EG"/>
+          </a:p>
+        </p:txBody>
+      </p:sp>
+    </p:spTree>
+    <p:extLst>
+      <p:ext uri="{BB962C8B-B14F-4D97-AF65-F5344CB8AC3E}">
+        <p14:creationId xmlns:p14="http://schemas.microsoft.com/office/powerpoint/2010/main" val="914045034"/>
+      </p:ext>
+    </p:extLst>
+  </p:cSld>
+  <p:clrMapOvr>
+    <a:masterClrMapping/>
+  </p:clrMapOvr>
+</p:notes>
+</file>
+
+<file path=ppt/notesSlides/notesSlide13.xml><?xml version="1.0" encoding="utf-8"?>
+<p:notes xmlns:a="http://schemas.openxmlformats.org/drawingml/2006/main" xmlns:r="http://schemas.openxmlformats.org/officeDocument/2006/relationships" xmlns:p="http://schemas.openxmlformats.org/presentationml/2006/main">
+  <p:cSld>
+    <p:spTree>
+      <p:nvGrpSpPr>
+        <p:cNvPr id="1" name=""/>
+        <p:cNvGrpSpPr/>
+        <p:nvPr/>
+      </p:nvGrpSpPr>
+      <p:grpSpPr>
+        <a:xfrm>
+          <a:off x="0" y="0"/>
+          <a:ext cx="0" cy="0"/>
+          <a:chOff x="0" y="0"/>
+          <a:chExt cx="0" cy="0"/>
+        </a:xfrm>
+      </p:grpSpPr>
+      <p:sp>
+        <p:nvSpPr>
+          <p:cNvPr id="2" name="Slide Image Placeholder 1"/>
+          <p:cNvSpPr>
+            <a:spLocks noGrp="1" noRot="1" noChangeAspect="1"/>
+          </p:cNvSpPr>
+          <p:nvPr>
+            <p:ph type="sldImg"/>
+          </p:nvPr>
+        </p:nvSpPr>
         <p:spPr/>
       </p:sp>
       <p:sp>
@@ -641,10 +715,7 @@
           <a:bodyPr/>
           <a:lstStyle/>
           <a:p>
-            <a:r>
-              <a:rPr lang="en-US" dirty="0"/>
-              <a:t>Chronic Kidney Disease is a progressive condition that's often silent — by the time a patient notices symptoms, kidney function may already be significantly reduced. The good news is that it's detectable early through routine blood and urine tests. So the objective of this project is: given a patient's routine clinical measurements, can we predict whether they have CKD, and which of those measurements matter most for that prediction?</a:t>
-            </a:r>
+            <a:endParaRPr lang="en-US" dirty="0"/>
           </a:p>
         </p:txBody>
       </p:sp>
@@ -728,10 +799,7 @@
           <a:bodyPr/>
           <a:lstStyle/>
           <a:p>
-            <a:r>
-              <a:rPr lang="en-US" dirty="0"/>
-              <a:t>The dataset comes from the UCI repository: 400 patients, 25 raw columns, collected at a hospital in Tamil Nadu over about two months. I deliberately used the raw, unprocessed version rather than a pre-cleaned variant, because the project criteria specifically require proving the data is not already clean. And it isn't — there are just over a thousand missing cells, a literal question mark used as a missing-value placeholder, stray tab characters inside values, numeric columns that got stored as text because of those stray tokens, and even one corrupted target label. All of this had to be handled explicitly, which I'll show next.</a:t>
-            </a:r>
+            <a:endParaRPr lang="en-US" dirty="0"/>
           </a:p>
         </p:txBody>
       </p:sp>
@@ -815,10 +883,7 @@
           <a:bodyPr/>
           <a:lstStyle/>
           <a:p>
-            <a:r>
-              <a:rPr lang="en-US" dirty="0"/>
-              <a:t>Every cleaning step is documented in the notebook so it's fully auditable. First I strip whitespace and tabs and standardize every missing-value marker to NaN. Then I fix the corrupted target label and coerce columns that should be numeric — like packed cell volume — back from text. I drop the id column since it's just a row index. Finally I impute: numeric columns with the median, since lab values like serum creatinine are heavily skewed by sick patients, and categorical columns with the mode. The chart on the right shows exactly where the missing values were concentrated before this step. After cleaning, there are zero missing values left.</a:t>
-            </a:r>
+            <a:endParaRPr lang="en-US" dirty="0"/>
           </a:p>
         </p:txBody>
       </p:sp>
@@ -902,10 +967,7 @@
           <a:bodyPr/>
           <a:lstStyle/>
           <a:p>
-            <a:r>
-              <a:rPr lang="en-US" dirty="0"/>
-              <a:t>For exploratory analysis I looked at more than six variables, both on their own — univariate — and against the target — bivariate — using five different plot types. This chart shows six numeric features split by CKD versus not-CKD. Hemoglobin and packed cell volume are visibly lower in CKD patients, and serum creatinine is visibly higher — exactly what you'd expect clinically, since creatinine builds up when kidneys can't filter it properly. This was also a useful sanity check that the cleaning step preserved the real medical signal rather than distorting it.</a:t>
-            </a:r>
+            <a:endParaRPr lang="en-US" dirty="0"/>
           </a:p>
         </p:txBody>
       </p:sp>
@@ -989,10 +1051,7 @@
           <a:bodyPr/>
           <a:lstStyle/>
           <a:p>
-            <a:r>
-              <a:rPr lang="en-US" dirty="0"/>
-              <a:t>This correlation heatmap looks at all numeric features together. Hemoglobin and packed cell volume correlate strongly negatively with CKD — higher values mean lower CKD likelihood — while serum creatinine, blood urea, and albumin correlate positively. This multivariate view is what guided the feature engineering and feature selection I'll describe next.</a:t>
-            </a:r>
+            <a:endParaRPr lang="en-US" dirty="0"/>
           </a:p>
         </p:txBody>
       </p:sp>
@@ -1076,10 +1135,7 @@
           <a:bodyPr/>
           <a:lstStyle/>
           <a:p>
-            <a:r>
-              <a:rPr lang="en-US" dirty="0"/>
-              <a:t>Two things happen at this stage. First, feature engineering: I added a new feature, the BUN-to-creatinine ratio, which is a recognized clinical marker in nephrology. Rather than hoping the model would discover this relationship on its own from the two raw columns, I computed it directly. Second, feature selection: I used SelectKBest with the ANOVA F-statistic, a filter method that scores each feature's relationship with the target independently of any particular model, and kept the top twelve — shown here as chips, including specific gravity, albumin, hemoglobin, packed cell volume, and our new engineered ratio.</a:t>
-            </a:r>
+            <a:endParaRPr lang="en-US" dirty="0"/>
           </a:p>
         </p:txBody>
       </p:sp>
@@ -1163,10 +1219,7 @@
           <a:bodyPr/>
           <a:lstStyle/>
           <a:p>
-            <a:r>
-              <a:rPr lang="en-US" dirty="0"/>
-              <a:t>For modeling I trained and tuned three algorithms from different families: Logistic Regression as a simple linear baseline, Random Forest as a tree ensemble that captures non-linear interactions, and SVM as a margin-based classifier. Each was tuned with GridSearchCV using 5-fold cross-validation, optimizing F1-score. Hyperparameters aren't learned from the data directly — get them wrong and you either overfit, memorizing training noise, or underfit, missing real patterns. Grid search tries every combination in a small grid and keeps the best cross-validated one. And for the final comparison, I used a held-out test set — twenty percent of the data that no training or tuning step ever touched — so the numbers on the next slide are an honest measure of generalization.</a:t>
-            </a:r>
+            <a:endParaRPr lang="en-US" dirty="0"/>
           </a:p>
         </p:txBody>
       </p:sp>
@@ -1250,10 +1303,7 @@
           <a:bodyPr/>
           <a:lstStyle/>
           <a:p>
-            <a:r>
-              <a:rPr lang="en-US" dirty="0"/>
-              <a:t>Here are the final numbers on the held-out test set. All three tuned models land in a similar, very strong range — accuracy around 98.75 percent, and an F1-score around 0.99. That tells us the classes are genuinely well separated once you have hemoglobin, serum creatinine, specific gravity and albumin available. I selected Logistic Regression as the deployed model since it had the best test-set F1, though realistically all three would be reasonable choices here. Both precision and recall are far above the project's minimum requirement of 0.30, which I also verified independently with a separate tester.py script that reloads the saved model without retraining. The confusion matrix on the right shows only one misclassification out of eighty test patients.</a:t>
-            </a:r>
+            <a:endParaRPr lang="en-US" dirty="0"/>
           </a:p>
         </p:txBody>
       </p:sp>
@@ -1851,50 +1901,143 @@
           </a:p>
         </p:txBody>
       </p:sp>
-      <p:sp>
-        <p:nvSpPr>
-          <p:cNvPr id="7" name="Text 5"/>
-          <p:cNvSpPr/>
-          <p:nvPr/>
-        </p:nvSpPr>
-        <p:spPr>
-          <a:xfrm>
-            <a:off x="822960" y="5989320"/>
-            <a:ext cx="5486400" cy="365760"/>
-          </a:xfrm>
-          <a:prstGeom prst="rect">
-            <a:avLst/>
-          </a:prstGeom>
-          <a:noFill/>
-          <a:ln/>
-        </p:spPr>
-        <p:txBody>
-          <a:bodyPr wrap="square" rtlCol="0" anchor="ctr"/>
-          <a:lstStyle/>
-          <a:p>
-            <a:pPr marL="0" indent="0">
-              <a:buNone/>
-            </a:pPr>
-            <a:r>
-              <a:rPr lang="en-US" sz="1300" dirty="0">
-                <a:solidFill>
-                  <a:srgbClr val="8FB9BC"/>
-                </a:solidFill>
-                <a:latin typeface="Calibri" pitchFamily="34" charset="0"/>
-                <a:ea typeface="Calibri" pitchFamily="34" charset="-122"/>
-                <a:cs typeface="Calibri" pitchFamily="34" charset="-120"/>
-              </a:rPr>
-              <a:t>Final Project Presentation</a:t>
-            </a:r>
-            <a:endParaRPr lang="en-US" sz="1300" dirty="0"/>
-          </a:p>
-        </p:txBody>
-      </p:sp>
+      <p:pic>
+        <p:nvPicPr>
+          <p:cNvPr id="65" name="Audio 64">
+            <a:extLst>
+              <a:ext uri="{FF2B5EF4-FFF2-40B4-BE49-F238E27FC236}">
+                <a16:creationId xmlns:a16="http://schemas.microsoft.com/office/drawing/2014/main" id="{432EBBE3-C450-EEA9-8A6D-AC0A1AEF811B}"/>
+              </a:ext>
+            </a:extLst>
+          </p:cNvPr>
+          <p:cNvPicPr>
+            <a:picLocks noChangeAspect="1"/>
+          </p:cNvPicPr>
+          <p:nvPr>
+            <a:audioFile r:link="rId2"/>
+            <p:extLst>
+              <p:ext uri="{DAA4B4D4-6D71-4841-9C94-3DE7FCFB9230}">
+                <p14:media xmlns:p14="http://schemas.microsoft.com/office/powerpoint/2010/main" r:embed="rId1"/>
+              </p:ext>
+            </p:extLst>
+          </p:nvPr>
+        </p:nvPicPr>
+        <p:blipFill>
+          <a:blip r:embed="rId5"/>
+          <a:stretch>
+            <a:fillRect/>
+          </a:stretch>
+        </p:blipFill>
+        <p:spPr>
+          <a:xfrm>
+            <a:off x="11226800" y="5892800"/>
+            <a:ext cx="812800" cy="812800"/>
+          </a:xfrm>
+          <a:prstGeom prst="rect">
+            <a:avLst/>
+          </a:prstGeom>
+        </p:spPr>
+      </p:pic>
     </p:spTree>
   </p:cSld>
   <p:clrMapOvr>
     <a:masterClrMapping/>
   </p:clrMapOvr>
+  <mc:AlternateContent xmlns:mc="http://schemas.openxmlformats.org/markup-compatibility/2006">
+    <mc:Choice xmlns:p14="http://schemas.microsoft.com/office/powerpoint/2010/main" Requires="p14">
+      <p:transition spd="slow" p14:dur="2000" advTm="24340"/>
+    </mc:Choice>
+    <mc:Fallback>
+      <p:transition spd="slow" advTm="24340"/>
+    </mc:Fallback>
+  </mc:AlternateContent>
+  <p:timing>
+    <p:tnLst>
+      <p:par>
+        <p:cTn id="1" dur="indefinite" restart="never" nodeType="tmRoot">
+          <p:childTnLst>
+            <p:seq concurrent="1" nextAc="seek">
+              <p:cTn id="2" dur="indefinite" nodeType="mainSeq">
+                <p:childTnLst>
+                  <p:par>
+                    <p:cTn id="3" fill="hold">
+                      <p:stCondLst>
+                        <p:cond delay="indefinite"/>
+                        <p:cond evt="onBegin" delay="0">
+                          <p:tn val="2"/>
+                        </p:cond>
+                      </p:stCondLst>
+                      <p:childTnLst>
+                        <p:par>
+                          <p:cTn id="4" fill="hold">
+                            <p:stCondLst>
+                              <p:cond delay="0"/>
+                            </p:stCondLst>
+                            <p:childTnLst>
+                              <p:par>
+                                <p:cTn id="5" presetID="1" presetClass="mediacall" presetSubtype="0" fill="hold" nodeType="afterEffect">
+                                  <p:stCondLst>
+                                    <p:cond delay="0"/>
+                                  </p:stCondLst>
+                                  <p:childTnLst>
+                                    <p:cmd type="call" cmd="playFrom(0.0)">
+                                      <p:cBhvr>
+                                        <p:cTn id="6" dur="1" fill="hold"/>
+                                        <p:tgtEl>
+                                          <p:spTgt spid="65"/>
+                                        </p:tgtEl>
+                                      </p:cBhvr>
+                                    </p:cmd>
+                                  </p:childTnLst>
+                                </p:cTn>
+                              </p:par>
+                            </p:childTnLst>
+                          </p:cTn>
+                        </p:par>
+                      </p:childTnLst>
+                    </p:cTn>
+                  </p:par>
+                </p:childTnLst>
+              </p:cTn>
+              <p:prevCondLst>
+                <p:cond evt="onPrev" delay="0">
+                  <p:tgtEl>
+                    <p:sldTgt/>
+                  </p:tgtEl>
+                </p:cond>
+              </p:prevCondLst>
+              <p:nextCondLst>
+                <p:cond evt="onNext" delay="0">
+                  <p:tgtEl>
+                    <p:sldTgt/>
+                  </p:tgtEl>
+                </p:cond>
+              </p:nextCondLst>
+            </p:seq>
+            <p:audio isNarration="1">
+              <p:cMediaNode vol="80000" showWhenStopped="0">
+                <p:cTn id="7" fill="hold" display="0">
+                  <p:stCondLst>
+                    <p:cond delay="indefinite"/>
+                  </p:stCondLst>
+                  <p:endCondLst>
+                    <p:cond evt="onStopAudio" delay="0">
+                      <p:tgtEl>
+                        <p:sldTgt/>
+                      </p:tgtEl>
+                    </p:cond>
+                  </p:endCondLst>
+                </p:cTn>
+                <p:tgtEl>
+                  <p:spTgt spid="65"/>
+                </p:tgtEl>
+              </p:cMediaNode>
+            </p:audio>
+          </p:childTnLst>
+        </p:cTn>
+      </p:par>
+    </p:tnLst>
+  </p:timing>
 </p:sld>
 </file>
 
@@ -2748,11 +2891,143 @@
           </a:p>
         </p:txBody>
       </p:sp>
+      <p:pic>
+        <p:nvPicPr>
+          <p:cNvPr id="34" name="Audio 33">
+            <a:extLst>
+              <a:ext uri="{FF2B5EF4-FFF2-40B4-BE49-F238E27FC236}">
+                <a16:creationId xmlns:a16="http://schemas.microsoft.com/office/drawing/2014/main" id="{6042759D-24AB-F683-D8E5-D6E615A633A9}"/>
+              </a:ext>
+            </a:extLst>
+          </p:cNvPr>
+          <p:cNvPicPr>
+            <a:picLocks noChangeAspect="1"/>
+          </p:cNvPicPr>
+          <p:nvPr>
+            <a:audioFile r:link="rId2"/>
+            <p:extLst>
+              <p:ext uri="{DAA4B4D4-6D71-4841-9C94-3DE7FCFB9230}">
+                <p14:media xmlns:p14="http://schemas.microsoft.com/office/powerpoint/2010/main" r:embed="rId1"/>
+              </p:ext>
+            </p:extLst>
+          </p:nvPr>
+        </p:nvPicPr>
+        <p:blipFill>
+          <a:blip r:embed="rId5"/>
+          <a:stretch>
+            <a:fillRect/>
+          </a:stretch>
+        </p:blipFill>
+        <p:spPr>
+          <a:xfrm>
+            <a:off x="11226800" y="5892800"/>
+            <a:ext cx="812800" cy="812800"/>
+          </a:xfrm>
+          <a:prstGeom prst="rect">
+            <a:avLst/>
+          </a:prstGeom>
+        </p:spPr>
+      </p:pic>
     </p:spTree>
   </p:cSld>
   <p:clrMapOvr>
     <a:masterClrMapping/>
   </p:clrMapOvr>
+  <mc:AlternateContent xmlns:mc="http://schemas.openxmlformats.org/markup-compatibility/2006">
+    <mc:Choice xmlns:p14="http://schemas.microsoft.com/office/powerpoint/2010/main" Requires="p14">
+      <p:transition spd="slow" p14:dur="2000" advTm="34460"/>
+    </mc:Choice>
+    <mc:Fallback>
+      <p:transition spd="slow" advTm="34460"/>
+    </mc:Fallback>
+  </mc:AlternateContent>
+  <p:timing>
+    <p:tnLst>
+      <p:par>
+        <p:cTn id="1" dur="indefinite" restart="never" nodeType="tmRoot">
+          <p:childTnLst>
+            <p:seq concurrent="1" nextAc="seek">
+              <p:cTn id="2" dur="indefinite" nodeType="mainSeq">
+                <p:childTnLst>
+                  <p:par>
+                    <p:cTn id="3" fill="hold">
+                      <p:stCondLst>
+                        <p:cond delay="indefinite"/>
+                        <p:cond evt="onBegin" delay="0">
+                          <p:tn val="2"/>
+                        </p:cond>
+                      </p:stCondLst>
+                      <p:childTnLst>
+                        <p:par>
+                          <p:cTn id="4" fill="hold">
+                            <p:stCondLst>
+                              <p:cond delay="0"/>
+                            </p:stCondLst>
+                            <p:childTnLst>
+                              <p:par>
+                                <p:cTn id="5" presetID="1" presetClass="mediacall" presetSubtype="0" fill="hold" nodeType="afterEffect">
+                                  <p:stCondLst>
+                                    <p:cond delay="0"/>
+                                  </p:stCondLst>
+                                  <p:childTnLst>
+                                    <p:cmd type="call" cmd="playFrom(0.0)">
+                                      <p:cBhvr>
+                                        <p:cTn id="6" dur="1" fill="hold"/>
+                                        <p:tgtEl>
+                                          <p:spTgt spid="34"/>
+                                        </p:tgtEl>
+                                      </p:cBhvr>
+                                    </p:cmd>
+                                  </p:childTnLst>
+                                </p:cTn>
+                              </p:par>
+                            </p:childTnLst>
+                          </p:cTn>
+                        </p:par>
+                      </p:childTnLst>
+                    </p:cTn>
+                  </p:par>
+                </p:childTnLst>
+              </p:cTn>
+              <p:prevCondLst>
+                <p:cond evt="onPrev" delay="0">
+                  <p:tgtEl>
+                    <p:sldTgt/>
+                  </p:tgtEl>
+                </p:cond>
+              </p:prevCondLst>
+              <p:nextCondLst>
+                <p:cond evt="onNext" delay="0">
+                  <p:tgtEl>
+                    <p:sldTgt/>
+                  </p:tgtEl>
+                </p:cond>
+              </p:nextCondLst>
+            </p:seq>
+            <p:audio isNarration="1">
+              <p:cMediaNode vol="80000" showWhenStopped="0">
+                <p:cTn id="7" fill="hold" display="0">
+                  <p:stCondLst>
+                    <p:cond delay="indefinite"/>
+                  </p:stCondLst>
+                  <p:endCondLst>
+                    <p:cond evt="onStopAudio" delay="0">
+                      <p:tgtEl>
+                        <p:sldTgt/>
+                      </p:tgtEl>
+                    </p:cond>
+                  </p:endCondLst>
+                </p:cTn>
+                <p:tgtEl>
+                  <p:spTgt spid="34"/>
+                </p:tgtEl>
+              </p:cMediaNode>
+            </p:audio>
+          </p:childTnLst>
+        </p:cTn>
+      </p:par>
+    </p:tnLst>
+  </p:timing>
 </p:sld>
 </file>
 
@@ -3530,11 +3805,143 @@
           </a:p>
         </p:txBody>
       </p:sp>
+      <p:pic>
+        <p:nvPicPr>
+          <p:cNvPr id="33" name="Audio 32">
+            <a:extLst>
+              <a:ext uri="{FF2B5EF4-FFF2-40B4-BE49-F238E27FC236}">
+                <a16:creationId xmlns:a16="http://schemas.microsoft.com/office/drawing/2014/main" id="{D941272F-AB2F-C383-2690-A8495FBBD276}"/>
+              </a:ext>
+            </a:extLst>
+          </p:cNvPr>
+          <p:cNvPicPr>
+            <a:picLocks noChangeAspect="1"/>
+          </p:cNvPicPr>
+          <p:nvPr>
+            <a:audioFile r:link="rId2"/>
+            <p:extLst>
+              <p:ext uri="{DAA4B4D4-6D71-4841-9C94-3DE7FCFB9230}">
+                <p14:media xmlns:p14="http://schemas.microsoft.com/office/powerpoint/2010/main" r:embed="rId1"/>
+              </p:ext>
+            </p:extLst>
+          </p:nvPr>
+        </p:nvPicPr>
+        <p:blipFill>
+          <a:blip r:embed="rId5"/>
+          <a:stretch>
+            <a:fillRect/>
+          </a:stretch>
+        </p:blipFill>
+        <p:spPr>
+          <a:xfrm>
+            <a:off x="11226800" y="5892800"/>
+            <a:ext cx="812800" cy="812800"/>
+          </a:xfrm>
+          <a:prstGeom prst="rect">
+            <a:avLst/>
+          </a:prstGeom>
+        </p:spPr>
+      </p:pic>
     </p:spTree>
   </p:cSld>
   <p:clrMapOvr>
     <a:masterClrMapping/>
   </p:clrMapOvr>
+  <mc:AlternateContent xmlns:mc="http://schemas.openxmlformats.org/markup-compatibility/2006">
+    <mc:Choice xmlns:p14="http://schemas.microsoft.com/office/powerpoint/2010/main" Requires="p14">
+      <p:transition spd="slow" p14:dur="2000" advTm="30880"/>
+    </mc:Choice>
+    <mc:Fallback>
+      <p:transition spd="slow" advTm="30880"/>
+    </mc:Fallback>
+  </mc:AlternateContent>
+  <p:timing>
+    <p:tnLst>
+      <p:par>
+        <p:cTn id="1" dur="indefinite" restart="never" nodeType="tmRoot">
+          <p:childTnLst>
+            <p:seq concurrent="1" nextAc="seek">
+              <p:cTn id="2" dur="indefinite" nodeType="mainSeq">
+                <p:childTnLst>
+                  <p:par>
+                    <p:cTn id="3" fill="hold">
+                      <p:stCondLst>
+                        <p:cond delay="indefinite"/>
+                        <p:cond evt="onBegin" delay="0">
+                          <p:tn val="2"/>
+                        </p:cond>
+                      </p:stCondLst>
+                      <p:childTnLst>
+                        <p:par>
+                          <p:cTn id="4" fill="hold">
+                            <p:stCondLst>
+                              <p:cond delay="0"/>
+                            </p:stCondLst>
+                            <p:childTnLst>
+                              <p:par>
+                                <p:cTn id="5" presetID="1" presetClass="mediacall" presetSubtype="0" fill="hold" nodeType="afterEffect">
+                                  <p:stCondLst>
+                                    <p:cond delay="0"/>
+                                  </p:stCondLst>
+                                  <p:childTnLst>
+                                    <p:cmd type="call" cmd="playFrom(0.0)">
+                                      <p:cBhvr>
+                                        <p:cTn id="6" dur="1" fill="hold"/>
+                                        <p:tgtEl>
+                                          <p:spTgt spid="33"/>
+                                        </p:tgtEl>
+                                      </p:cBhvr>
+                                    </p:cmd>
+                                  </p:childTnLst>
+                                </p:cTn>
+                              </p:par>
+                            </p:childTnLst>
+                          </p:cTn>
+                        </p:par>
+                      </p:childTnLst>
+                    </p:cTn>
+                  </p:par>
+                </p:childTnLst>
+              </p:cTn>
+              <p:prevCondLst>
+                <p:cond evt="onPrev" delay="0">
+                  <p:tgtEl>
+                    <p:sldTgt/>
+                  </p:tgtEl>
+                </p:cond>
+              </p:prevCondLst>
+              <p:nextCondLst>
+                <p:cond evt="onNext" delay="0">
+                  <p:tgtEl>
+                    <p:sldTgt/>
+                  </p:tgtEl>
+                </p:cond>
+              </p:nextCondLst>
+            </p:seq>
+            <p:audio isNarration="1">
+              <p:cMediaNode vol="80000" showWhenStopped="0">
+                <p:cTn id="7" fill="hold" display="0">
+                  <p:stCondLst>
+                    <p:cond delay="indefinite"/>
+                  </p:stCondLst>
+                  <p:endCondLst>
+                    <p:cond evt="onStopAudio" delay="0">
+                      <p:tgtEl>
+                        <p:sldTgt/>
+                      </p:tgtEl>
+                    </p:cond>
+                  </p:endCondLst>
+                </p:cTn>
+                <p:tgtEl>
+                  <p:spTgt spid="33"/>
+                </p:tgtEl>
+              </p:cMediaNode>
+            </p:audio>
+          </p:childTnLst>
+        </p:cTn>
+      </p:par>
+    </p:tnLst>
+  </p:timing>
 </p:sld>
 </file>
 
@@ -3693,7 +4100,7 @@
           <p:nvPr/>
         </p:nvPicPr>
         <p:blipFill>
-          <a:blip r:embed="rId2"/>
+          <a:blip r:embed="rId5"/>
           <a:srcRect l="26957" t="16603" r="28724" b="6328"/>
           <a:stretch>
             <a:fillRect/>
@@ -3703,6 +4110,43 @@
           <a:xfrm>
             <a:off x="6357943" y="640080"/>
             <a:ext cx="4935584" cy="5578816"/>
+          </a:xfrm>
+          <a:prstGeom prst="rect">
+            <a:avLst/>
+          </a:prstGeom>
+        </p:spPr>
+      </p:pic>
+      <p:pic>
+        <p:nvPicPr>
+          <p:cNvPr id="36" name="Audio 35">
+            <a:extLst>
+              <a:ext uri="{FF2B5EF4-FFF2-40B4-BE49-F238E27FC236}">
+                <a16:creationId xmlns:a16="http://schemas.microsoft.com/office/drawing/2014/main" id="{85BDA0FD-D3C2-535F-F74D-9EC73BA20918}"/>
+              </a:ext>
+            </a:extLst>
+          </p:cNvPr>
+          <p:cNvPicPr>
+            <a:picLocks noChangeAspect="1"/>
+          </p:cNvPicPr>
+          <p:nvPr>
+            <a:audioFile r:link="rId2"/>
+            <p:extLst>
+              <p:ext uri="{DAA4B4D4-6D71-4841-9C94-3DE7FCFB9230}">
+                <p14:media xmlns:p14="http://schemas.microsoft.com/office/powerpoint/2010/main" r:embed="rId1"/>
+              </p:ext>
+            </p:extLst>
+          </p:nvPr>
+        </p:nvPicPr>
+        <p:blipFill>
+          <a:blip r:embed="rId6"/>
+          <a:stretch>
+            <a:fillRect/>
+          </a:stretch>
+        </p:blipFill>
+        <p:spPr>
+          <a:xfrm>
+            <a:off x="11226800" y="5892800"/>
+            <a:ext cx="812800" cy="812800"/>
           </a:xfrm>
           <a:prstGeom prst="rect">
             <a:avLst/>
@@ -3719,6 +4163,101 @@
   <p:clrMapOvr>
     <a:masterClrMapping/>
   </p:clrMapOvr>
+  <mc:AlternateContent xmlns:mc="http://schemas.openxmlformats.org/markup-compatibility/2006">
+    <mc:Choice xmlns:p14="http://schemas.microsoft.com/office/powerpoint/2010/main" Requires="p14">
+      <p:transition spd="slow" p14:dur="2000" advTm="7840"/>
+    </mc:Choice>
+    <mc:Fallback>
+      <p:transition spd="slow" advTm="7840"/>
+    </mc:Fallback>
+  </mc:AlternateContent>
+  <p:timing>
+    <p:tnLst>
+      <p:par>
+        <p:cTn id="1" dur="indefinite" restart="never" nodeType="tmRoot">
+          <p:childTnLst>
+            <p:seq concurrent="1" nextAc="seek">
+              <p:cTn id="2" dur="indefinite" nodeType="mainSeq">
+                <p:childTnLst>
+                  <p:par>
+                    <p:cTn id="3" fill="hold">
+                      <p:stCondLst>
+                        <p:cond delay="indefinite"/>
+                        <p:cond evt="onBegin" delay="0">
+                          <p:tn val="2"/>
+                        </p:cond>
+                      </p:stCondLst>
+                      <p:childTnLst>
+                        <p:par>
+                          <p:cTn id="4" fill="hold">
+                            <p:stCondLst>
+                              <p:cond delay="0"/>
+                            </p:stCondLst>
+                            <p:childTnLst>
+                              <p:par>
+                                <p:cTn id="5" presetID="1" presetClass="mediacall" presetSubtype="0" fill="hold" nodeType="afterEffect">
+                                  <p:stCondLst>
+                                    <p:cond delay="0"/>
+                                  </p:stCondLst>
+                                  <p:childTnLst>
+                                    <p:cmd type="call" cmd="playFrom(0.0)">
+                                      <p:cBhvr>
+                                        <p:cTn id="6" dur="1" fill="hold"/>
+                                        <p:tgtEl>
+                                          <p:spTgt spid="36"/>
+                                        </p:tgtEl>
+                                      </p:cBhvr>
+                                    </p:cmd>
+                                  </p:childTnLst>
+                                </p:cTn>
+                              </p:par>
+                            </p:childTnLst>
+                          </p:cTn>
+                        </p:par>
+                      </p:childTnLst>
+                    </p:cTn>
+                  </p:par>
+                </p:childTnLst>
+              </p:cTn>
+              <p:prevCondLst>
+                <p:cond evt="onPrev" delay="0">
+                  <p:tgtEl>
+                    <p:sldTgt/>
+                  </p:tgtEl>
+                </p:cond>
+              </p:prevCondLst>
+              <p:nextCondLst>
+                <p:cond evt="onNext" delay="0">
+                  <p:tgtEl>
+                    <p:sldTgt/>
+                  </p:tgtEl>
+                </p:cond>
+              </p:nextCondLst>
+            </p:seq>
+            <p:audio isNarration="1">
+              <p:cMediaNode vol="80000" showWhenStopped="0">
+                <p:cTn id="7" fill="hold" display="0">
+                  <p:stCondLst>
+                    <p:cond delay="indefinite"/>
+                  </p:stCondLst>
+                  <p:endCondLst>
+                    <p:cond evt="onStopAudio" delay="0">
+                      <p:tgtEl>
+                        <p:sldTgt/>
+                      </p:tgtEl>
+                    </p:cond>
+                  </p:endCondLst>
+                </p:cTn>
+                <p:tgtEl>
+                  <p:spTgt spid="36"/>
+                </p:tgtEl>
+              </p:cMediaNode>
+            </p:audio>
+          </p:childTnLst>
+        </p:cTn>
+      </p:par>
+    </p:tnLst>
+  </p:timing>
 </p:sld>
 </file>
 
@@ -3937,6 +4476,14 @@
   <p:clrMapOvr>
     <a:masterClrMapping/>
   </p:clrMapOvr>
+  <mc:AlternateContent xmlns:mc="http://schemas.openxmlformats.org/markup-compatibility/2006">
+    <mc:Choice xmlns:p14="http://schemas.microsoft.com/office/powerpoint/2010/main" Requires="p14">
+      <p:transition spd="slow" p14:dur="2000" advTm="3822"/>
+    </mc:Choice>
+    <mc:Fallback>
+      <p:transition spd="slow" advTm="3822"/>
+    </mc:Fallback>
+  </mc:AlternateContent>
 </p:sld>
 </file>
 
@@ -4672,11 +5219,169 @@
           </a:p>
         </p:txBody>
       </p:sp>
+      <p:pic>
+        <p:nvPicPr>
+          <p:cNvPr id="42" name="Audio 41">
+            <a:extLst>
+              <a:ext uri="{FF2B5EF4-FFF2-40B4-BE49-F238E27FC236}">
+                <a16:creationId xmlns:a16="http://schemas.microsoft.com/office/drawing/2014/main" id="{E809DA82-0F7A-65B3-8442-C815CE616915}"/>
+              </a:ext>
+            </a:extLst>
+          </p:cNvPr>
+          <p:cNvPicPr>
+            <a:picLocks noChangeAspect="1"/>
+          </p:cNvPicPr>
+          <p:nvPr>
+            <a:audioFile r:link="rId2"/>
+            <p:extLst>
+              <p:ext uri="{DAA4B4D4-6D71-4841-9C94-3DE7FCFB9230}">
+                <p14:media xmlns:p14="http://schemas.microsoft.com/office/powerpoint/2010/main" r:embed="rId1"/>
+              </p:ext>
+            </p:extLst>
+          </p:nvPr>
+        </p:nvPicPr>
+        <p:blipFill>
+          <a:blip r:embed="rId5"/>
+          <a:stretch>
+            <a:fillRect/>
+          </a:stretch>
+        </p:blipFill>
+        <p:spPr>
+          <a:xfrm>
+            <a:off x="11226800" y="5892800"/>
+            <a:ext cx="812800" cy="812800"/>
+          </a:xfrm>
+          <a:prstGeom prst="rect">
+            <a:avLst/>
+          </a:prstGeom>
+        </p:spPr>
+      </p:pic>
     </p:spTree>
   </p:cSld>
   <p:clrMapOvr>
     <a:masterClrMapping/>
   </p:clrMapOvr>
+  <mc:AlternateContent xmlns:mc="http://schemas.openxmlformats.org/markup-compatibility/2006">
+    <mc:Choice xmlns:p14="http://schemas.microsoft.com/office/powerpoint/2010/main" Requires="p14">
+      <p:transition spd="slow" p14:dur="2000" advTm="34320"/>
+    </mc:Choice>
+    <mc:Fallback>
+      <p:transition spd="slow" advTm="34320"/>
+    </mc:Fallback>
+  </mc:AlternateContent>
+  <p:timing>
+    <p:tnLst>
+      <p:par>
+        <p:cTn id="1" dur="indefinite" restart="never" nodeType="tmRoot">
+          <p:childTnLst>
+            <p:seq concurrent="1" nextAc="seek">
+              <p:cTn id="2" dur="indefinite" nodeType="mainSeq">
+                <p:childTnLst>
+                  <p:par>
+                    <p:cTn id="3" fill="hold">
+                      <p:stCondLst>
+                        <p:cond delay="indefinite"/>
+                        <p:cond evt="onBegin" delay="0">
+                          <p:tn val="2"/>
+                        </p:cond>
+                      </p:stCondLst>
+                      <p:childTnLst>
+                        <p:par>
+                          <p:cTn id="4" fill="hold">
+                            <p:stCondLst>
+                              <p:cond delay="0"/>
+                            </p:stCondLst>
+                            <p:childTnLst>
+                              <p:par>
+                                <p:cTn id="5" presetID="1" presetClass="mediacall" presetSubtype="0" fill="hold" nodeType="afterEffect">
+                                  <p:stCondLst>
+                                    <p:cond delay="0"/>
+                                  </p:stCondLst>
+                                  <p:childTnLst>
+                                    <p:cmd type="call" cmd="playFrom(0.0)">
+                                      <p:cBhvr>
+                                        <p:cTn id="6" dur="1" fill="hold"/>
+                                        <p:tgtEl>
+                                          <p:spTgt spid="42"/>
+                                        </p:tgtEl>
+                                      </p:cBhvr>
+                                    </p:cmd>
+                                  </p:childTnLst>
+                                </p:cTn>
+                              </p:par>
+                            </p:childTnLst>
+                          </p:cTn>
+                        </p:par>
+                        <p:par>
+                          <p:cTn id="7" fill="hold">
+                            <p:stCondLst>
+                              <p:cond delay="0"/>
+                            </p:stCondLst>
+                            <p:childTnLst>
+                              <p:par>
+                                <p:cTn id="8" presetID="1" presetClass="mediacall" presetSubtype="0" fill="hold" nodeType="afterEffect">
+                                  <p:stCondLst>
+                                    <p:cond delay="0"/>
+                                  </p:stCondLst>
+                                  <p:childTnLst>
+                                    <p:cmd type="call" cmd="playFrom(0.0)">
+                                      <p:cBhvr>
+                                        <p:cTn id="9" dur="1" fill="hold"/>
+                                        <p:tgtEl>
+                                          <p:spTgt spid="42"/>
+                                        </p:tgtEl>
+                                      </p:cBhvr>
+                                    </p:cmd>
+                                  </p:childTnLst>
+                                </p:cTn>
+                              </p:par>
+                            </p:childTnLst>
+                          </p:cTn>
+                        </p:par>
+                      </p:childTnLst>
+                    </p:cTn>
+                  </p:par>
+                </p:childTnLst>
+              </p:cTn>
+              <p:prevCondLst>
+                <p:cond evt="onPrev" delay="0">
+                  <p:tgtEl>
+                    <p:sldTgt/>
+                  </p:tgtEl>
+                </p:cond>
+              </p:prevCondLst>
+              <p:nextCondLst>
+                <p:cond evt="onNext" delay="0">
+                  <p:tgtEl>
+                    <p:sldTgt/>
+                  </p:tgtEl>
+                </p:cond>
+              </p:nextCondLst>
+            </p:seq>
+            <p:audio isNarration="1">
+              <p:cMediaNode vol="80000" showWhenStopped="0">
+                <p:cTn id="10" fill="hold" display="0">
+                  <p:stCondLst>
+                    <p:cond delay="indefinite"/>
+                  </p:stCondLst>
+                  <p:endCondLst>
+                    <p:cond evt="onStopAudio" delay="0">
+                      <p:tgtEl>
+                        <p:sldTgt/>
+                      </p:tgtEl>
+                    </p:cond>
+                  </p:endCondLst>
+                </p:cTn>
+                <p:tgtEl>
+                  <p:spTgt spid="42"/>
+                </p:tgtEl>
+              </p:cMediaNode>
+            </p:audio>
+          </p:childTnLst>
+        </p:cTn>
+      </p:par>
+    </p:tnLst>
+  </p:timing>
 </p:sld>
 </file>
 
@@ -5673,11 +6378,143 @@
           </a:p>
         </p:txBody>
       </p:sp>
+      <p:pic>
+        <p:nvPicPr>
+          <p:cNvPr id="86" name="Audio 85">
+            <a:extLst>
+              <a:ext uri="{FF2B5EF4-FFF2-40B4-BE49-F238E27FC236}">
+                <a16:creationId xmlns:a16="http://schemas.microsoft.com/office/drawing/2014/main" id="{4ED0A41E-0159-617A-FE07-939EEF941AAE}"/>
+              </a:ext>
+            </a:extLst>
+          </p:cNvPr>
+          <p:cNvPicPr>
+            <a:picLocks noChangeAspect="1"/>
+          </p:cNvPicPr>
+          <p:nvPr>
+            <a:audioFile r:link="rId2"/>
+            <p:extLst>
+              <p:ext uri="{DAA4B4D4-6D71-4841-9C94-3DE7FCFB9230}">
+                <p14:media xmlns:p14="http://schemas.microsoft.com/office/powerpoint/2010/main" r:embed="rId1"/>
+              </p:ext>
+            </p:extLst>
+          </p:nvPr>
+        </p:nvPicPr>
+        <p:blipFill>
+          <a:blip r:embed="rId5"/>
+          <a:stretch>
+            <a:fillRect/>
+          </a:stretch>
+        </p:blipFill>
+        <p:spPr>
+          <a:xfrm>
+            <a:off x="11226800" y="5892800"/>
+            <a:ext cx="812800" cy="812800"/>
+          </a:xfrm>
+          <a:prstGeom prst="rect">
+            <a:avLst/>
+          </a:prstGeom>
+        </p:spPr>
+      </p:pic>
     </p:spTree>
   </p:cSld>
   <p:clrMapOvr>
     <a:masterClrMapping/>
   </p:clrMapOvr>
+  <mc:AlternateContent xmlns:mc="http://schemas.openxmlformats.org/markup-compatibility/2006">
+    <mc:Choice xmlns:p14="http://schemas.microsoft.com/office/powerpoint/2010/main" Requires="p14">
+      <p:transition spd="slow" p14:dur="2000" advTm="40060"/>
+    </mc:Choice>
+    <mc:Fallback>
+      <p:transition spd="slow" advTm="40060"/>
+    </mc:Fallback>
+  </mc:AlternateContent>
+  <p:timing>
+    <p:tnLst>
+      <p:par>
+        <p:cTn id="1" dur="indefinite" restart="never" nodeType="tmRoot">
+          <p:childTnLst>
+            <p:seq concurrent="1" nextAc="seek">
+              <p:cTn id="2" dur="indefinite" nodeType="mainSeq">
+                <p:childTnLst>
+                  <p:par>
+                    <p:cTn id="3" fill="hold">
+                      <p:stCondLst>
+                        <p:cond delay="indefinite"/>
+                        <p:cond evt="onBegin" delay="0">
+                          <p:tn val="2"/>
+                        </p:cond>
+                      </p:stCondLst>
+                      <p:childTnLst>
+                        <p:par>
+                          <p:cTn id="4" fill="hold">
+                            <p:stCondLst>
+                              <p:cond delay="0"/>
+                            </p:stCondLst>
+                            <p:childTnLst>
+                              <p:par>
+                                <p:cTn id="5" presetID="1" presetClass="mediacall" presetSubtype="0" fill="hold" nodeType="afterEffect">
+                                  <p:stCondLst>
+                                    <p:cond delay="0"/>
+                                  </p:stCondLst>
+                                  <p:childTnLst>
+                                    <p:cmd type="call" cmd="playFrom(0.0)">
+                                      <p:cBhvr>
+                                        <p:cTn id="6" dur="1" fill="hold"/>
+                                        <p:tgtEl>
+                                          <p:spTgt spid="86"/>
+                                        </p:tgtEl>
+                                      </p:cBhvr>
+                                    </p:cmd>
+                                  </p:childTnLst>
+                                </p:cTn>
+                              </p:par>
+                            </p:childTnLst>
+                          </p:cTn>
+                        </p:par>
+                      </p:childTnLst>
+                    </p:cTn>
+                  </p:par>
+                </p:childTnLst>
+              </p:cTn>
+              <p:prevCondLst>
+                <p:cond evt="onPrev" delay="0">
+                  <p:tgtEl>
+                    <p:sldTgt/>
+                  </p:tgtEl>
+                </p:cond>
+              </p:prevCondLst>
+              <p:nextCondLst>
+                <p:cond evt="onNext" delay="0">
+                  <p:tgtEl>
+                    <p:sldTgt/>
+                  </p:tgtEl>
+                </p:cond>
+              </p:nextCondLst>
+            </p:seq>
+            <p:audio isNarration="1">
+              <p:cMediaNode vol="80000" showWhenStopped="0">
+                <p:cTn id="7" fill="hold" display="0">
+                  <p:stCondLst>
+                    <p:cond delay="indefinite"/>
+                  </p:stCondLst>
+                  <p:endCondLst>
+                    <p:cond evt="onStopAudio" delay="0">
+                      <p:tgtEl>
+                        <p:sldTgt/>
+                      </p:tgtEl>
+                    </p:cond>
+                  </p:endCondLst>
+                </p:cTn>
+                <p:tgtEl>
+                  <p:spTgt spid="86"/>
+                </p:tgtEl>
+              </p:cMediaNode>
+            </p:audio>
+          </p:childTnLst>
+        </p:cTn>
+      </p:par>
+    </p:tnLst>
+  </p:timing>
 </p:sld>
 </file>
 
@@ -5793,7 +6630,7 @@
           <p:nvPr/>
         </p:nvPicPr>
         <p:blipFill>
-          <a:blip r:embed="rId3"/>
+          <a:blip r:embed="rId5"/>
           <a:stretch>
             <a:fillRect/>
           </a:stretch>
@@ -6550,11 +7387,169 @@
           </a:p>
         </p:txBody>
       </p:sp>
+      <p:pic>
+        <p:nvPicPr>
+          <p:cNvPr id="29" name="Audio 28">
+            <a:extLst>
+              <a:ext uri="{FF2B5EF4-FFF2-40B4-BE49-F238E27FC236}">
+                <a16:creationId xmlns:a16="http://schemas.microsoft.com/office/drawing/2014/main" id="{FF407AAA-3043-BA7D-4E6C-15C57FBD479C}"/>
+              </a:ext>
+            </a:extLst>
+          </p:cNvPr>
+          <p:cNvPicPr>
+            <a:picLocks noChangeAspect="1"/>
+          </p:cNvPicPr>
+          <p:nvPr>
+            <a:audioFile r:link="rId2"/>
+            <p:extLst>
+              <p:ext uri="{DAA4B4D4-6D71-4841-9C94-3DE7FCFB9230}">
+                <p14:media xmlns:p14="http://schemas.microsoft.com/office/powerpoint/2010/main" r:embed="rId1"/>
+              </p:ext>
+            </p:extLst>
+          </p:nvPr>
+        </p:nvPicPr>
+        <p:blipFill>
+          <a:blip r:embed="rId6"/>
+          <a:stretch>
+            <a:fillRect/>
+          </a:stretch>
+        </p:blipFill>
+        <p:spPr>
+          <a:xfrm>
+            <a:off x="11226800" y="5892800"/>
+            <a:ext cx="812800" cy="812800"/>
+          </a:xfrm>
+          <a:prstGeom prst="rect">
+            <a:avLst/>
+          </a:prstGeom>
+        </p:spPr>
+      </p:pic>
     </p:spTree>
   </p:cSld>
   <p:clrMapOvr>
     <a:masterClrMapping/>
   </p:clrMapOvr>
+  <mc:AlternateContent xmlns:mc="http://schemas.openxmlformats.org/markup-compatibility/2006">
+    <mc:Choice xmlns:p14="http://schemas.microsoft.com/office/powerpoint/2010/main" Requires="p14">
+      <p:transition spd="slow" p14:dur="2000" advTm="52060"/>
+    </mc:Choice>
+    <mc:Fallback>
+      <p:transition spd="slow" advTm="52060"/>
+    </mc:Fallback>
+  </mc:AlternateContent>
+  <p:timing>
+    <p:tnLst>
+      <p:par>
+        <p:cTn id="1" dur="indefinite" restart="never" nodeType="tmRoot">
+          <p:childTnLst>
+            <p:seq concurrent="1" nextAc="seek">
+              <p:cTn id="2" dur="indefinite" nodeType="mainSeq">
+                <p:childTnLst>
+                  <p:par>
+                    <p:cTn id="3" fill="hold">
+                      <p:stCondLst>
+                        <p:cond delay="indefinite"/>
+                        <p:cond evt="onBegin" delay="0">
+                          <p:tn val="2"/>
+                        </p:cond>
+                      </p:stCondLst>
+                      <p:childTnLst>
+                        <p:par>
+                          <p:cTn id="4" fill="hold">
+                            <p:stCondLst>
+                              <p:cond delay="0"/>
+                            </p:stCondLst>
+                            <p:childTnLst>
+                              <p:par>
+                                <p:cTn id="5" presetID="1" presetClass="mediacall" presetSubtype="0" fill="hold" nodeType="afterEffect">
+                                  <p:stCondLst>
+                                    <p:cond delay="0"/>
+                                  </p:stCondLst>
+                                  <p:childTnLst>
+                                    <p:cmd type="call" cmd="playFrom(0.0)">
+                                      <p:cBhvr>
+                                        <p:cTn id="6" dur="1" fill="hold"/>
+                                        <p:tgtEl>
+                                          <p:spTgt spid="29"/>
+                                        </p:tgtEl>
+                                      </p:cBhvr>
+                                    </p:cmd>
+                                  </p:childTnLst>
+                                </p:cTn>
+                              </p:par>
+                            </p:childTnLst>
+                          </p:cTn>
+                        </p:par>
+                        <p:par>
+                          <p:cTn id="7" fill="hold">
+                            <p:stCondLst>
+                              <p:cond delay="0"/>
+                            </p:stCondLst>
+                            <p:childTnLst>
+                              <p:par>
+                                <p:cTn id="8" presetID="1" presetClass="mediacall" presetSubtype="0" fill="hold" nodeType="afterEffect">
+                                  <p:stCondLst>
+                                    <p:cond delay="0"/>
+                                  </p:stCondLst>
+                                  <p:childTnLst>
+                                    <p:cmd type="call" cmd="playFrom(0.0)">
+                                      <p:cBhvr>
+                                        <p:cTn id="9" dur="1" fill="hold"/>
+                                        <p:tgtEl>
+                                          <p:spTgt spid="29"/>
+                                        </p:tgtEl>
+                                      </p:cBhvr>
+                                    </p:cmd>
+                                  </p:childTnLst>
+                                </p:cTn>
+                              </p:par>
+                            </p:childTnLst>
+                          </p:cTn>
+                        </p:par>
+                      </p:childTnLst>
+                    </p:cTn>
+                  </p:par>
+                </p:childTnLst>
+              </p:cTn>
+              <p:prevCondLst>
+                <p:cond evt="onPrev" delay="0">
+                  <p:tgtEl>
+                    <p:sldTgt/>
+                  </p:tgtEl>
+                </p:cond>
+              </p:prevCondLst>
+              <p:nextCondLst>
+                <p:cond evt="onNext" delay="0">
+                  <p:tgtEl>
+                    <p:sldTgt/>
+                  </p:tgtEl>
+                </p:cond>
+              </p:nextCondLst>
+            </p:seq>
+            <p:audio isNarration="1">
+              <p:cMediaNode vol="80000" showWhenStopped="0">
+                <p:cTn id="10" fill="hold" display="0">
+                  <p:stCondLst>
+                    <p:cond delay="indefinite"/>
+                  </p:stCondLst>
+                  <p:endCondLst>
+                    <p:cond evt="onStopAudio" delay="0">
+                      <p:tgtEl>
+                        <p:sldTgt/>
+                      </p:tgtEl>
+                    </p:cond>
+                  </p:endCondLst>
+                </p:cTn>
+                <p:tgtEl>
+                  <p:spTgt spid="29"/>
+                </p:tgtEl>
+              </p:cMediaNode>
+            </p:audio>
+          </p:childTnLst>
+        </p:cTn>
+      </p:par>
+    </p:tnLst>
+  </p:timing>
 </p:sld>
 </file>
 
@@ -6709,7 +7704,7 @@
           <p:nvPr/>
         </p:nvPicPr>
         <p:blipFill>
-          <a:blip r:embed="rId3"/>
+          <a:blip r:embed="rId5"/>
           <a:stretch>
             <a:fillRect/>
           </a:stretch>
@@ -7117,11 +8112,143 @@
           </a:p>
         </p:txBody>
       </p:sp>
+      <p:pic>
+        <p:nvPicPr>
+          <p:cNvPr id="41" name="Audio 40">
+            <a:extLst>
+              <a:ext uri="{FF2B5EF4-FFF2-40B4-BE49-F238E27FC236}">
+                <a16:creationId xmlns:a16="http://schemas.microsoft.com/office/drawing/2014/main" id="{DC0C96FE-B8E5-4A27-9738-F9F1EE2F6DBA}"/>
+              </a:ext>
+            </a:extLst>
+          </p:cNvPr>
+          <p:cNvPicPr>
+            <a:picLocks noChangeAspect="1"/>
+          </p:cNvPicPr>
+          <p:nvPr>
+            <a:audioFile r:link="rId2"/>
+            <p:extLst>
+              <p:ext uri="{DAA4B4D4-6D71-4841-9C94-3DE7FCFB9230}">
+                <p14:media xmlns:p14="http://schemas.microsoft.com/office/powerpoint/2010/main" r:embed="rId1"/>
+              </p:ext>
+            </p:extLst>
+          </p:nvPr>
+        </p:nvPicPr>
+        <p:blipFill>
+          <a:blip r:embed="rId6"/>
+          <a:stretch>
+            <a:fillRect/>
+          </a:stretch>
+        </p:blipFill>
+        <p:spPr>
+          <a:xfrm>
+            <a:off x="11226800" y="5892800"/>
+            <a:ext cx="812800" cy="812800"/>
+          </a:xfrm>
+          <a:prstGeom prst="rect">
+            <a:avLst/>
+          </a:prstGeom>
+        </p:spPr>
+      </p:pic>
     </p:spTree>
   </p:cSld>
   <p:clrMapOvr>
     <a:masterClrMapping/>
   </p:clrMapOvr>
+  <mc:AlternateContent xmlns:mc="http://schemas.openxmlformats.org/markup-compatibility/2006">
+    <mc:Choice xmlns:p14="http://schemas.microsoft.com/office/powerpoint/2010/main" Requires="p14">
+      <p:transition spd="slow" p14:dur="2000" advTm="35300"/>
+    </mc:Choice>
+    <mc:Fallback>
+      <p:transition spd="slow" advTm="35300"/>
+    </mc:Fallback>
+  </mc:AlternateContent>
+  <p:timing>
+    <p:tnLst>
+      <p:par>
+        <p:cTn id="1" dur="indefinite" restart="never" nodeType="tmRoot">
+          <p:childTnLst>
+            <p:seq concurrent="1" nextAc="seek">
+              <p:cTn id="2" dur="indefinite" nodeType="mainSeq">
+                <p:childTnLst>
+                  <p:par>
+                    <p:cTn id="3" fill="hold">
+                      <p:stCondLst>
+                        <p:cond delay="indefinite"/>
+                        <p:cond evt="onBegin" delay="0">
+                          <p:tn val="2"/>
+                        </p:cond>
+                      </p:stCondLst>
+                      <p:childTnLst>
+                        <p:par>
+                          <p:cTn id="4" fill="hold">
+                            <p:stCondLst>
+                              <p:cond delay="0"/>
+                            </p:stCondLst>
+                            <p:childTnLst>
+                              <p:par>
+                                <p:cTn id="5" presetID="1" presetClass="mediacall" presetSubtype="0" fill="hold" nodeType="afterEffect">
+                                  <p:stCondLst>
+                                    <p:cond delay="0"/>
+                                  </p:stCondLst>
+                                  <p:childTnLst>
+                                    <p:cmd type="call" cmd="playFrom(0.0)">
+                                      <p:cBhvr>
+                                        <p:cTn id="6" dur="1" fill="hold"/>
+                                        <p:tgtEl>
+                                          <p:spTgt spid="41"/>
+                                        </p:tgtEl>
+                                      </p:cBhvr>
+                                    </p:cmd>
+                                  </p:childTnLst>
+                                </p:cTn>
+                              </p:par>
+                            </p:childTnLst>
+                          </p:cTn>
+                        </p:par>
+                      </p:childTnLst>
+                    </p:cTn>
+                  </p:par>
+                </p:childTnLst>
+              </p:cTn>
+              <p:prevCondLst>
+                <p:cond evt="onPrev" delay="0">
+                  <p:tgtEl>
+                    <p:sldTgt/>
+                  </p:tgtEl>
+                </p:cond>
+              </p:prevCondLst>
+              <p:nextCondLst>
+                <p:cond evt="onNext" delay="0">
+                  <p:tgtEl>
+                    <p:sldTgt/>
+                  </p:tgtEl>
+                </p:cond>
+              </p:nextCondLst>
+            </p:seq>
+            <p:audio isNarration="1">
+              <p:cMediaNode vol="80000" showWhenStopped="0">
+                <p:cTn id="7" fill="hold" display="0">
+                  <p:stCondLst>
+                    <p:cond delay="indefinite"/>
+                  </p:stCondLst>
+                  <p:endCondLst>
+                    <p:cond evt="onStopAudio" delay="0">
+                      <p:tgtEl>
+                        <p:sldTgt/>
+                      </p:tgtEl>
+                    </p:cond>
+                  </p:endCondLst>
+                </p:cTn>
+                <p:tgtEl>
+                  <p:spTgt spid="41"/>
+                </p:tgtEl>
+              </p:cMediaNode>
+            </p:audio>
+          </p:childTnLst>
+        </p:cTn>
+      </p:par>
+    </p:tnLst>
+  </p:timing>
 </p:sld>
 </file>
 
@@ -7237,7 +8364,7 @@
           <p:nvPr/>
         </p:nvPicPr>
         <p:blipFill>
-          <a:blip r:embed="rId3"/>
+          <a:blip r:embed="rId5"/>
           <a:stretch>
             <a:fillRect/>
           </a:stretch>
@@ -7291,11 +8418,169 @@
           </a:p>
         </p:txBody>
       </p:sp>
+      <p:pic>
+        <p:nvPicPr>
+          <p:cNvPr id="21" name="Audio 20">
+            <a:extLst>
+              <a:ext uri="{FF2B5EF4-FFF2-40B4-BE49-F238E27FC236}">
+                <a16:creationId xmlns:a16="http://schemas.microsoft.com/office/drawing/2014/main" id="{F2B9541D-BEFB-6A1B-9292-7510A04A7E55}"/>
+              </a:ext>
+            </a:extLst>
+          </p:cNvPr>
+          <p:cNvPicPr>
+            <a:picLocks noChangeAspect="1"/>
+          </p:cNvPicPr>
+          <p:nvPr>
+            <a:audioFile r:link="rId2"/>
+            <p:extLst>
+              <p:ext uri="{DAA4B4D4-6D71-4841-9C94-3DE7FCFB9230}">
+                <p14:media xmlns:p14="http://schemas.microsoft.com/office/powerpoint/2010/main" r:embed="rId1"/>
+              </p:ext>
+            </p:extLst>
+          </p:nvPr>
+        </p:nvPicPr>
+        <p:blipFill>
+          <a:blip r:embed="rId6"/>
+          <a:stretch>
+            <a:fillRect/>
+          </a:stretch>
+        </p:blipFill>
+        <p:spPr>
+          <a:xfrm>
+            <a:off x="11226800" y="5892800"/>
+            <a:ext cx="812800" cy="812800"/>
+          </a:xfrm>
+          <a:prstGeom prst="rect">
+            <a:avLst/>
+          </a:prstGeom>
+        </p:spPr>
+      </p:pic>
     </p:spTree>
   </p:cSld>
   <p:clrMapOvr>
     <a:masterClrMapping/>
   </p:clrMapOvr>
+  <mc:AlternateContent xmlns:mc="http://schemas.openxmlformats.org/markup-compatibility/2006">
+    <mc:Choice xmlns:p14="http://schemas.microsoft.com/office/powerpoint/2010/main" Requires="p14">
+      <p:transition spd="slow" p14:dur="2000" advTm="27820"/>
+    </mc:Choice>
+    <mc:Fallback>
+      <p:transition spd="slow" advTm="27820"/>
+    </mc:Fallback>
+  </mc:AlternateContent>
+  <p:timing>
+    <p:tnLst>
+      <p:par>
+        <p:cTn id="1" dur="indefinite" restart="never" nodeType="tmRoot">
+          <p:childTnLst>
+            <p:seq concurrent="1" nextAc="seek">
+              <p:cTn id="2" dur="indefinite" nodeType="mainSeq">
+                <p:childTnLst>
+                  <p:par>
+                    <p:cTn id="3" fill="hold">
+                      <p:stCondLst>
+                        <p:cond delay="indefinite"/>
+                        <p:cond evt="onBegin" delay="0">
+                          <p:tn val="2"/>
+                        </p:cond>
+                      </p:stCondLst>
+                      <p:childTnLst>
+                        <p:par>
+                          <p:cTn id="4" fill="hold">
+                            <p:stCondLst>
+                              <p:cond delay="0"/>
+                            </p:stCondLst>
+                            <p:childTnLst>
+                              <p:par>
+                                <p:cTn id="5" presetID="1" presetClass="mediacall" presetSubtype="0" fill="hold" nodeType="afterEffect">
+                                  <p:stCondLst>
+                                    <p:cond delay="0"/>
+                                  </p:stCondLst>
+                                  <p:childTnLst>
+                                    <p:cmd type="call" cmd="playFrom(0.0)">
+                                      <p:cBhvr>
+                                        <p:cTn id="6" dur="1" fill="hold"/>
+                                        <p:tgtEl>
+                                          <p:spTgt spid="21"/>
+                                        </p:tgtEl>
+                                      </p:cBhvr>
+                                    </p:cmd>
+                                  </p:childTnLst>
+                                </p:cTn>
+                              </p:par>
+                            </p:childTnLst>
+                          </p:cTn>
+                        </p:par>
+                        <p:par>
+                          <p:cTn id="7" fill="hold">
+                            <p:stCondLst>
+                              <p:cond delay="0"/>
+                            </p:stCondLst>
+                            <p:childTnLst>
+                              <p:par>
+                                <p:cTn id="8" presetID="1" presetClass="mediacall" presetSubtype="0" fill="hold" nodeType="afterEffect">
+                                  <p:stCondLst>
+                                    <p:cond delay="0"/>
+                                  </p:stCondLst>
+                                  <p:childTnLst>
+                                    <p:cmd type="call" cmd="playFrom(0.0)">
+                                      <p:cBhvr>
+                                        <p:cTn id="9" dur="1" fill="hold"/>
+                                        <p:tgtEl>
+                                          <p:spTgt spid="21"/>
+                                        </p:tgtEl>
+                                      </p:cBhvr>
+                                    </p:cmd>
+                                  </p:childTnLst>
+                                </p:cTn>
+                              </p:par>
+                            </p:childTnLst>
+                          </p:cTn>
+                        </p:par>
+                      </p:childTnLst>
+                    </p:cTn>
+                  </p:par>
+                </p:childTnLst>
+              </p:cTn>
+              <p:prevCondLst>
+                <p:cond evt="onPrev" delay="0">
+                  <p:tgtEl>
+                    <p:sldTgt/>
+                  </p:tgtEl>
+                </p:cond>
+              </p:prevCondLst>
+              <p:nextCondLst>
+                <p:cond evt="onNext" delay="0">
+                  <p:tgtEl>
+                    <p:sldTgt/>
+                  </p:tgtEl>
+                </p:cond>
+              </p:nextCondLst>
+            </p:seq>
+            <p:audio isNarration="1">
+              <p:cMediaNode vol="80000" showWhenStopped="0">
+                <p:cTn id="10" fill="hold" display="0">
+                  <p:stCondLst>
+                    <p:cond delay="indefinite"/>
+                  </p:stCondLst>
+                  <p:endCondLst>
+                    <p:cond evt="onStopAudio" delay="0">
+                      <p:tgtEl>
+                        <p:sldTgt/>
+                      </p:tgtEl>
+                    </p:cond>
+                  </p:endCondLst>
+                </p:cTn>
+                <p:tgtEl>
+                  <p:spTgt spid="21"/>
+                </p:tgtEl>
+              </p:cMediaNode>
+            </p:audio>
+          </p:childTnLst>
+        </p:cTn>
+      </p:par>
+    </p:tnLst>
+  </p:timing>
 </p:sld>
 </file>
 
@@ -8556,11 +9841,169 @@
           </a:p>
         </p:txBody>
       </p:sp>
+      <p:pic>
+        <p:nvPicPr>
+          <p:cNvPr id="44" name="Audio 43">
+            <a:extLst>
+              <a:ext uri="{FF2B5EF4-FFF2-40B4-BE49-F238E27FC236}">
+                <a16:creationId xmlns:a16="http://schemas.microsoft.com/office/drawing/2014/main" id="{3B300AD5-6AD9-4CB8-4AC8-28A41AAB763B}"/>
+              </a:ext>
+            </a:extLst>
+          </p:cNvPr>
+          <p:cNvPicPr>
+            <a:picLocks noChangeAspect="1"/>
+          </p:cNvPicPr>
+          <p:nvPr>
+            <a:audioFile r:link="rId2"/>
+            <p:extLst>
+              <p:ext uri="{DAA4B4D4-6D71-4841-9C94-3DE7FCFB9230}">
+                <p14:media xmlns:p14="http://schemas.microsoft.com/office/powerpoint/2010/main" r:embed="rId1"/>
+              </p:ext>
+            </p:extLst>
+          </p:nvPr>
+        </p:nvPicPr>
+        <p:blipFill>
+          <a:blip r:embed="rId5"/>
+          <a:stretch>
+            <a:fillRect/>
+          </a:stretch>
+        </p:blipFill>
+        <p:spPr>
+          <a:xfrm>
+            <a:off x="11226800" y="5892800"/>
+            <a:ext cx="812800" cy="812800"/>
+          </a:xfrm>
+          <a:prstGeom prst="rect">
+            <a:avLst/>
+          </a:prstGeom>
+        </p:spPr>
+      </p:pic>
     </p:spTree>
   </p:cSld>
   <p:clrMapOvr>
     <a:masterClrMapping/>
   </p:clrMapOvr>
+  <mc:AlternateContent xmlns:mc="http://schemas.openxmlformats.org/markup-compatibility/2006">
+    <mc:Choice xmlns:p14="http://schemas.microsoft.com/office/powerpoint/2010/main" Requires="p14">
+      <p:transition spd="slow" p14:dur="2000" advTm="48180"/>
+    </mc:Choice>
+    <mc:Fallback>
+      <p:transition spd="slow" advTm="48180"/>
+    </mc:Fallback>
+  </mc:AlternateContent>
+  <p:timing>
+    <p:tnLst>
+      <p:par>
+        <p:cTn id="1" dur="indefinite" restart="never" nodeType="tmRoot">
+          <p:childTnLst>
+            <p:seq concurrent="1" nextAc="seek">
+              <p:cTn id="2" dur="indefinite" nodeType="mainSeq">
+                <p:childTnLst>
+                  <p:par>
+                    <p:cTn id="3" fill="hold">
+                      <p:stCondLst>
+                        <p:cond delay="indefinite"/>
+                        <p:cond evt="onBegin" delay="0">
+                          <p:tn val="2"/>
+                        </p:cond>
+                      </p:stCondLst>
+                      <p:childTnLst>
+                        <p:par>
+                          <p:cTn id="4" fill="hold">
+                            <p:stCondLst>
+                              <p:cond delay="0"/>
+                            </p:stCondLst>
+                            <p:childTnLst>
+                              <p:par>
+                                <p:cTn id="5" presetID="1" presetClass="mediacall" presetSubtype="0" fill="hold" nodeType="afterEffect">
+                                  <p:stCondLst>
+                                    <p:cond delay="0"/>
+                                  </p:stCondLst>
+                                  <p:childTnLst>
+                                    <p:cmd type="call" cmd="playFrom(0.0)">
+                                      <p:cBhvr>
+                                        <p:cTn id="6" dur="1" fill="hold"/>
+                                        <p:tgtEl>
+                                          <p:spTgt spid="44"/>
+                                        </p:tgtEl>
+                                      </p:cBhvr>
+                                    </p:cmd>
+                                  </p:childTnLst>
+                                </p:cTn>
+                              </p:par>
+                            </p:childTnLst>
+                          </p:cTn>
+                        </p:par>
+                        <p:par>
+                          <p:cTn id="7" fill="hold">
+                            <p:stCondLst>
+                              <p:cond delay="0"/>
+                            </p:stCondLst>
+                            <p:childTnLst>
+                              <p:par>
+                                <p:cTn id="8" presetID="1" presetClass="mediacall" presetSubtype="0" fill="hold" nodeType="afterEffect">
+                                  <p:stCondLst>
+                                    <p:cond delay="0"/>
+                                  </p:stCondLst>
+                                  <p:childTnLst>
+                                    <p:cmd type="call" cmd="playFrom(0.0)">
+                                      <p:cBhvr>
+                                        <p:cTn id="9" dur="1" fill="hold"/>
+                                        <p:tgtEl>
+                                          <p:spTgt spid="44"/>
+                                        </p:tgtEl>
+                                      </p:cBhvr>
+                                    </p:cmd>
+                                  </p:childTnLst>
+                                </p:cTn>
+                              </p:par>
+                            </p:childTnLst>
+                          </p:cTn>
+                        </p:par>
+                      </p:childTnLst>
+                    </p:cTn>
+                  </p:par>
+                </p:childTnLst>
+              </p:cTn>
+              <p:prevCondLst>
+                <p:cond evt="onPrev" delay="0">
+                  <p:tgtEl>
+                    <p:sldTgt/>
+                  </p:tgtEl>
+                </p:cond>
+              </p:prevCondLst>
+              <p:nextCondLst>
+                <p:cond evt="onNext" delay="0">
+                  <p:tgtEl>
+                    <p:sldTgt/>
+                  </p:tgtEl>
+                </p:cond>
+              </p:nextCondLst>
+            </p:seq>
+            <p:audio isNarration="1">
+              <p:cMediaNode vol="80000" showWhenStopped="0">
+                <p:cTn id="10" fill="hold" display="0">
+                  <p:stCondLst>
+                    <p:cond delay="indefinite"/>
+                  </p:stCondLst>
+                  <p:endCondLst>
+                    <p:cond evt="onStopAudio" delay="0">
+                      <p:tgtEl>
+                        <p:sldTgt/>
+                      </p:tgtEl>
+                    </p:cond>
+                  </p:endCondLst>
+                </p:cTn>
+                <p:tgtEl>
+                  <p:spTgt spid="44"/>
+                </p:tgtEl>
+              </p:cMediaNode>
+            </p:audio>
+          </p:childTnLst>
+        </p:cTn>
+      </p:par>
+    </p:tnLst>
+  </p:timing>
 </p:sld>
 </file>
 
@@ -9353,11 +10796,143 @@
           </a:p>
         </p:txBody>
       </p:sp>
+      <p:pic>
+        <p:nvPicPr>
+          <p:cNvPr id="41" name="Audio 40">
+            <a:extLst>
+              <a:ext uri="{FF2B5EF4-FFF2-40B4-BE49-F238E27FC236}">
+                <a16:creationId xmlns:a16="http://schemas.microsoft.com/office/drawing/2014/main" id="{4F845CAC-0204-561C-414C-DDC12733AF89}"/>
+              </a:ext>
+            </a:extLst>
+          </p:cNvPr>
+          <p:cNvPicPr>
+            <a:picLocks noChangeAspect="1"/>
+          </p:cNvPicPr>
+          <p:nvPr>
+            <a:audioFile r:link="rId2"/>
+            <p:extLst>
+              <p:ext uri="{DAA4B4D4-6D71-4841-9C94-3DE7FCFB9230}">
+                <p14:media xmlns:p14="http://schemas.microsoft.com/office/powerpoint/2010/main" r:embed="rId1"/>
+              </p:ext>
+            </p:extLst>
+          </p:nvPr>
+        </p:nvPicPr>
+        <p:blipFill>
+          <a:blip r:embed="rId5"/>
+          <a:stretch>
+            <a:fillRect/>
+          </a:stretch>
+        </p:blipFill>
+        <p:spPr>
+          <a:xfrm>
+            <a:off x="11226800" y="5892800"/>
+            <a:ext cx="812800" cy="812800"/>
+          </a:xfrm>
+          <a:prstGeom prst="rect">
+            <a:avLst/>
+          </a:prstGeom>
+        </p:spPr>
+      </p:pic>
     </p:spTree>
   </p:cSld>
   <p:clrMapOvr>
     <a:masterClrMapping/>
   </p:clrMapOvr>
+  <mc:AlternateContent xmlns:mc="http://schemas.openxmlformats.org/markup-compatibility/2006">
+    <mc:Choice xmlns:p14="http://schemas.microsoft.com/office/powerpoint/2010/main" Requires="p14">
+      <p:transition spd="slow" p14:dur="2000" advTm="40800"/>
+    </mc:Choice>
+    <mc:Fallback>
+      <p:transition spd="slow" advTm="40800"/>
+    </mc:Fallback>
+  </mc:AlternateContent>
+  <p:timing>
+    <p:tnLst>
+      <p:par>
+        <p:cTn id="1" dur="indefinite" restart="never" nodeType="tmRoot">
+          <p:childTnLst>
+            <p:seq concurrent="1" nextAc="seek">
+              <p:cTn id="2" dur="indefinite" nodeType="mainSeq">
+                <p:childTnLst>
+                  <p:par>
+                    <p:cTn id="3" fill="hold">
+                      <p:stCondLst>
+                        <p:cond delay="indefinite"/>
+                        <p:cond evt="onBegin" delay="0">
+                          <p:tn val="2"/>
+                        </p:cond>
+                      </p:stCondLst>
+                      <p:childTnLst>
+                        <p:par>
+                          <p:cTn id="4" fill="hold">
+                            <p:stCondLst>
+                              <p:cond delay="0"/>
+                            </p:stCondLst>
+                            <p:childTnLst>
+                              <p:par>
+                                <p:cTn id="5" presetID="1" presetClass="mediacall" presetSubtype="0" fill="hold" nodeType="afterEffect">
+                                  <p:stCondLst>
+                                    <p:cond delay="0"/>
+                                  </p:stCondLst>
+                                  <p:childTnLst>
+                                    <p:cmd type="call" cmd="playFrom(0.0)">
+                                      <p:cBhvr>
+                                        <p:cTn id="6" dur="1" fill="hold"/>
+                                        <p:tgtEl>
+                                          <p:spTgt spid="41"/>
+                                        </p:tgtEl>
+                                      </p:cBhvr>
+                                    </p:cmd>
+                                  </p:childTnLst>
+                                </p:cTn>
+                              </p:par>
+                            </p:childTnLst>
+                          </p:cTn>
+                        </p:par>
+                      </p:childTnLst>
+                    </p:cTn>
+                  </p:par>
+                </p:childTnLst>
+              </p:cTn>
+              <p:prevCondLst>
+                <p:cond evt="onPrev" delay="0">
+                  <p:tgtEl>
+                    <p:sldTgt/>
+                  </p:tgtEl>
+                </p:cond>
+              </p:prevCondLst>
+              <p:nextCondLst>
+                <p:cond evt="onNext" delay="0">
+                  <p:tgtEl>
+                    <p:sldTgt/>
+                  </p:tgtEl>
+                </p:cond>
+              </p:nextCondLst>
+            </p:seq>
+            <p:audio isNarration="1">
+              <p:cMediaNode vol="80000" showWhenStopped="0">
+                <p:cTn id="7" fill="hold" display="0">
+                  <p:stCondLst>
+                    <p:cond delay="indefinite"/>
+                  </p:stCondLst>
+                  <p:endCondLst>
+                    <p:cond evt="onStopAudio" delay="0">
+                      <p:tgtEl>
+                        <p:sldTgt/>
+                      </p:tgtEl>
+                    </p:cond>
+                  </p:endCondLst>
+                </p:cTn>
+                <p:tgtEl>
+                  <p:spTgt spid="41"/>
+                </p:tgtEl>
+              </p:cMediaNode>
+            </p:audio>
+          </p:childTnLst>
+        </p:cTn>
+      </p:par>
+    </p:tnLst>
+  </p:timing>
 </p:sld>
 </file>
 
@@ -11116,7 +12691,7 @@
           <p:nvPr/>
         </p:nvPicPr>
         <p:blipFill>
-          <a:blip r:embed="rId3"/>
+          <a:blip r:embed="rId5"/>
           <a:stretch>
             <a:fillRect/>
           </a:stretch>
@@ -11209,11 +12784,143 @@
           </a:p>
         </p:txBody>
       </p:sp>
+      <p:pic>
+        <p:nvPicPr>
+          <p:cNvPr id="30" name="Audio 29">
+            <a:extLst>
+              <a:ext uri="{FF2B5EF4-FFF2-40B4-BE49-F238E27FC236}">
+                <a16:creationId xmlns:a16="http://schemas.microsoft.com/office/drawing/2014/main" id="{4B04702F-BF9A-0DDF-6F96-63332C1F26B1}"/>
+              </a:ext>
+            </a:extLst>
+          </p:cNvPr>
+          <p:cNvPicPr>
+            <a:picLocks noChangeAspect="1"/>
+          </p:cNvPicPr>
+          <p:nvPr>
+            <a:audioFile r:link="rId2"/>
+            <p:extLst>
+              <p:ext uri="{DAA4B4D4-6D71-4841-9C94-3DE7FCFB9230}">
+                <p14:media xmlns:p14="http://schemas.microsoft.com/office/powerpoint/2010/main" r:embed="rId1"/>
+              </p:ext>
+            </p:extLst>
+          </p:nvPr>
+        </p:nvPicPr>
+        <p:blipFill>
+          <a:blip r:embed="rId6"/>
+          <a:stretch>
+            <a:fillRect/>
+          </a:stretch>
+        </p:blipFill>
+        <p:spPr>
+          <a:xfrm>
+            <a:off x="11226800" y="5892800"/>
+            <a:ext cx="812800" cy="812800"/>
+          </a:xfrm>
+          <a:prstGeom prst="rect">
+            <a:avLst/>
+          </a:prstGeom>
+        </p:spPr>
+      </p:pic>
     </p:spTree>
   </p:cSld>
   <p:clrMapOvr>
     <a:masterClrMapping/>
   </p:clrMapOvr>
+  <mc:AlternateContent xmlns:mc="http://schemas.openxmlformats.org/markup-compatibility/2006">
+    <mc:Choice xmlns:p14="http://schemas.microsoft.com/office/powerpoint/2010/main" Requires="p14">
+      <p:transition spd="slow" p14:dur="2000" advTm="40160"/>
+    </mc:Choice>
+    <mc:Fallback>
+      <p:transition spd="slow" advTm="40160"/>
+    </mc:Fallback>
+  </mc:AlternateContent>
+  <p:timing>
+    <p:tnLst>
+      <p:par>
+        <p:cTn id="1" dur="indefinite" restart="never" nodeType="tmRoot">
+          <p:childTnLst>
+            <p:seq concurrent="1" nextAc="seek">
+              <p:cTn id="2" dur="indefinite" nodeType="mainSeq">
+                <p:childTnLst>
+                  <p:par>
+                    <p:cTn id="3" fill="hold">
+                      <p:stCondLst>
+                        <p:cond delay="indefinite"/>
+                        <p:cond evt="onBegin" delay="0">
+                          <p:tn val="2"/>
+                        </p:cond>
+                      </p:stCondLst>
+                      <p:childTnLst>
+                        <p:par>
+                          <p:cTn id="4" fill="hold">
+                            <p:stCondLst>
+                              <p:cond delay="0"/>
+                            </p:stCondLst>
+                            <p:childTnLst>
+                              <p:par>
+                                <p:cTn id="5" presetID="1" presetClass="mediacall" presetSubtype="0" fill="hold" nodeType="afterEffect">
+                                  <p:stCondLst>
+                                    <p:cond delay="0"/>
+                                  </p:stCondLst>
+                                  <p:childTnLst>
+                                    <p:cmd type="call" cmd="playFrom(0.0)">
+                                      <p:cBhvr>
+                                        <p:cTn id="6" dur="1" fill="hold"/>
+                                        <p:tgtEl>
+                                          <p:spTgt spid="30"/>
+                                        </p:tgtEl>
+                                      </p:cBhvr>
+                                    </p:cmd>
+                                  </p:childTnLst>
+                                </p:cTn>
+                              </p:par>
+                            </p:childTnLst>
+                          </p:cTn>
+                        </p:par>
+                      </p:childTnLst>
+                    </p:cTn>
+                  </p:par>
+                </p:childTnLst>
+              </p:cTn>
+              <p:prevCondLst>
+                <p:cond evt="onPrev" delay="0">
+                  <p:tgtEl>
+                    <p:sldTgt/>
+                  </p:tgtEl>
+                </p:cond>
+              </p:prevCondLst>
+              <p:nextCondLst>
+                <p:cond evt="onNext" delay="0">
+                  <p:tgtEl>
+                    <p:sldTgt/>
+                  </p:tgtEl>
+                </p:cond>
+              </p:nextCondLst>
+            </p:seq>
+            <p:audio isNarration="1">
+              <p:cMediaNode vol="80000" showWhenStopped="0">
+                <p:cTn id="7" fill="hold" display="0">
+                  <p:stCondLst>
+                    <p:cond delay="indefinite"/>
+                  </p:stCondLst>
+                  <p:endCondLst>
+                    <p:cond evt="onStopAudio" delay="0">
+                      <p:tgtEl>
+                        <p:sldTgt/>
+                      </p:tgtEl>
+                    </p:cond>
+                  </p:endCondLst>
+                </p:cTn>
+                <p:tgtEl>
+                  <p:spTgt spid="30"/>
+                </p:tgtEl>
+              </p:cMediaNode>
+            </p:audio>
+          </p:childTnLst>
+        </p:cTn>
+      </p:par>
+    </p:tnLst>
+  </p:timing>
 </p:sld>
 </file>
 
